--- a/제출서류/(승건)Figure.pptx
+++ b/제출서류/(승건)Figure.pptx
@@ -197,7 +197,7 @@
           <a:p>
             <a:fld id="{6D07E46F-B36E-448D-82D2-486DFE961E56}" type="datetimeFigureOut">
               <a:rPr lang="ko-KR" altLang="en-US" smtClean="0"/>
-              <a:t>2026-04-19</a:t>
+              <a:t>2026-04-20</a:t>
             </a:fld>
             <a:endParaRPr lang="ko-KR" altLang="en-US"/>
           </a:p>
@@ -611,7 +611,7 @@
           <a:p>
             <a:fld id="{8ACA7197-8235-4E7A-BCE4-33C09BF0AC50}" type="datetimeFigureOut">
               <a:rPr lang="ko-KR" altLang="en-US" smtClean="0"/>
-              <a:t>2026-04-19</a:t>
+              <a:t>2026-04-20</a:t>
             </a:fld>
             <a:endParaRPr lang="ko-KR" altLang="en-US"/>
           </a:p>
@@ -809,7 +809,7 @@
           <a:p>
             <a:fld id="{8ACA7197-8235-4E7A-BCE4-33C09BF0AC50}" type="datetimeFigureOut">
               <a:rPr lang="ko-KR" altLang="en-US" smtClean="0"/>
-              <a:t>2026-04-19</a:t>
+              <a:t>2026-04-20</a:t>
             </a:fld>
             <a:endParaRPr lang="ko-KR" altLang="en-US"/>
           </a:p>
@@ -1017,7 +1017,7 @@
           <a:p>
             <a:fld id="{8ACA7197-8235-4E7A-BCE4-33C09BF0AC50}" type="datetimeFigureOut">
               <a:rPr lang="ko-KR" altLang="en-US" smtClean="0"/>
-              <a:t>2026-04-19</a:t>
+              <a:t>2026-04-20</a:t>
             </a:fld>
             <a:endParaRPr lang="ko-KR" altLang="en-US"/>
           </a:p>
@@ -1215,7 +1215,7 @@
           <a:p>
             <a:fld id="{8ACA7197-8235-4E7A-BCE4-33C09BF0AC50}" type="datetimeFigureOut">
               <a:rPr lang="ko-KR" altLang="en-US" smtClean="0"/>
-              <a:t>2026-04-19</a:t>
+              <a:t>2026-04-20</a:t>
             </a:fld>
             <a:endParaRPr lang="ko-KR" altLang="en-US"/>
           </a:p>
@@ -1490,7 +1490,7 @@
           <a:p>
             <a:fld id="{8ACA7197-8235-4E7A-BCE4-33C09BF0AC50}" type="datetimeFigureOut">
               <a:rPr lang="ko-KR" altLang="en-US" smtClean="0"/>
-              <a:t>2026-04-19</a:t>
+              <a:t>2026-04-20</a:t>
             </a:fld>
             <a:endParaRPr lang="ko-KR" altLang="en-US"/>
           </a:p>
@@ -1755,7 +1755,7 @@
           <a:p>
             <a:fld id="{8ACA7197-8235-4E7A-BCE4-33C09BF0AC50}" type="datetimeFigureOut">
               <a:rPr lang="ko-KR" altLang="en-US" smtClean="0"/>
-              <a:t>2026-04-19</a:t>
+              <a:t>2026-04-20</a:t>
             </a:fld>
             <a:endParaRPr lang="ko-KR" altLang="en-US"/>
           </a:p>
@@ -2167,7 +2167,7 @@
           <a:p>
             <a:fld id="{8ACA7197-8235-4E7A-BCE4-33C09BF0AC50}" type="datetimeFigureOut">
               <a:rPr lang="ko-KR" altLang="en-US" smtClean="0"/>
-              <a:t>2026-04-19</a:t>
+              <a:t>2026-04-20</a:t>
             </a:fld>
             <a:endParaRPr lang="ko-KR" altLang="en-US"/>
           </a:p>
@@ -2308,7 +2308,7 @@
           <a:p>
             <a:fld id="{8ACA7197-8235-4E7A-BCE4-33C09BF0AC50}" type="datetimeFigureOut">
               <a:rPr lang="ko-KR" altLang="en-US" smtClean="0"/>
-              <a:t>2026-04-19</a:t>
+              <a:t>2026-04-20</a:t>
             </a:fld>
             <a:endParaRPr lang="ko-KR" altLang="en-US"/>
           </a:p>
@@ -2421,7 +2421,7 @@
           <a:p>
             <a:fld id="{8ACA7197-8235-4E7A-BCE4-33C09BF0AC50}" type="datetimeFigureOut">
               <a:rPr lang="ko-KR" altLang="en-US" smtClean="0"/>
-              <a:t>2026-04-19</a:t>
+              <a:t>2026-04-20</a:t>
             </a:fld>
             <a:endParaRPr lang="ko-KR" altLang="en-US"/>
           </a:p>
@@ -2732,7 +2732,7 @@
           <a:p>
             <a:fld id="{8ACA7197-8235-4E7A-BCE4-33C09BF0AC50}" type="datetimeFigureOut">
               <a:rPr lang="ko-KR" altLang="en-US" smtClean="0"/>
-              <a:t>2026-04-19</a:t>
+              <a:t>2026-04-20</a:t>
             </a:fld>
             <a:endParaRPr lang="ko-KR" altLang="en-US"/>
           </a:p>
@@ -3020,7 +3020,7 @@
           <a:p>
             <a:fld id="{8ACA7197-8235-4E7A-BCE4-33C09BF0AC50}" type="datetimeFigureOut">
               <a:rPr lang="ko-KR" altLang="en-US" smtClean="0"/>
-              <a:t>2026-04-19</a:t>
+              <a:t>2026-04-20</a:t>
             </a:fld>
             <a:endParaRPr lang="ko-KR" altLang="en-US"/>
           </a:p>
@@ -3261,7 +3261,7 @@
           <a:p>
             <a:fld id="{8ACA7197-8235-4E7A-BCE4-33C09BF0AC50}" type="datetimeFigureOut">
               <a:rPr lang="ko-KR" altLang="en-US" smtClean="0"/>
-              <a:t>2026-04-19</a:t>
+              <a:t>2026-04-20</a:t>
             </a:fld>
             <a:endParaRPr lang="ko-KR" altLang="en-US"/>
           </a:p>
@@ -3692,7 +3692,7 @@
         </p:nvSpPr>
         <p:spPr>
           <a:xfrm>
-            <a:off x="2422683" y="2219318"/>
+            <a:off x="1381283" y="2176985"/>
             <a:ext cx="980793" cy="521208"/>
           </a:xfrm>
           <a:prstGeom prst="flowChartDocument">
@@ -3763,14 +3763,14 @@
         </p:nvSpPr>
         <p:spPr>
           <a:xfrm>
-            <a:off x="3771592" y="2230334"/>
+            <a:off x="2730192" y="2188001"/>
             <a:ext cx="950308" cy="498276"/>
           </a:xfrm>
           <a:prstGeom prst="roundRect">
             <a:avLst/>
           </a:prstGeom>
           <a:solidFill>
-            <a:srgbClr val="FFCC66"/>
+            <a:schemeClr val="bg1"/>
           </a:solidFill>
           <a:ln>
             <a:solidFill>
@@ -3825,7 +3825,7 @@
         </p:nvSpPr>
         <p:spPr>
           <a:xfrm>
-            <a:off x="5086312" y="2188064"/>
+            <a:off x="4044912" y="2145731"/>
             <a:ext cx="1109206" cy="582376"/>
           </a:xfrm>
           <a:prstGeom prst="flowChartDocument">
@@ -3914,7 +3914,7 @@
         </p:nvSpPr>
         <p:spPr>
           <a:xfrm>
-            <a:off x="2250073" y="1077921"/>
+            <a:off x="1208673" y="1035588"/>
             <a:ext cx="937982" cy="703077"/>
           </a:xfrm>
           <a:prstGeom prst="flowChartMagneticDisk">
@@ -3999,7 +3999,7 @@
         </p:nvSpPr>
         <p:spPr>
           <a:xfrm>
-            <a:off x="1252969" y="3391657"/>
+            <a:off x="211569" y="3349324"/>
             <a:ext cx="6057559" cy="2887960"/>
           </a:xfrm>
           <a:prstGeom prst="roundRect">
@@ -4057,7 +4057,7 @@
         </p:nvSpPr>
         <p:spPr>
           <a:xfrm>
-            <a:off x="1174133" y="678830"/>
+            <a:off x="132733" y="636497"/>
             <a:ext cx="6057559" cy="2390303"/>
           </a:xfrm>
           <a:prstGeom prst="roundRect">
@@ -4115,7 +4115,7 @@
         </p:nvSpPr>
         <p:spPr>
           <a:xfrm>
-            <a:off x="2621499" y="714515"/>
+            <a:off x="1580099" y="672182"/>
             <a:ext cx="3250494" cy="261610"/>
           </a:xfrm>
           <a:prstGeom prst="rect">
@@ -4172,7 +4172,7 @@
         </p:nvSpPr>
         <p:spPr>
           <a:xfrm>
-            <a:off x="3283445" y="1077920"/>
+            <a:off x="2242045" y="1035587"/>
             <a:ext cx="937982" cy="703077"/>
           </a:xfrm>
           <a:prstGeom prst="flowChartMagneticDisk">
@@ -4285,7 +4285,7 @@
         </p:nvSpPr>
         <p:spPr>
           <a:xfrm>
-            <a:off x="4309838" y="1077920"/>
+            <a:off x="3268438" y="1035587"/>
             <a:ext cx="937982" cy="703077"/>
           </a:xfrm>
           <a:prstGeom prst="flowChartMagneticDisk">
@@ -4395,7 +4395,7 @@
         </p:nvSpPr>
         <p:spPr>
           <a:xfrm>
-            <a:off x="5336231" y="1077920"/>
+            <a:off x="4294831" y="1035587"/>
             <a:ext cx="937982" cy="703077"/>
           </a:xfrm>
           <a:prstGeom prst="flowChartMagneticDisk">
@@ -4505,7 +4505,7 @@
         </p:nvSpPr>
         <p:spPr>
           <a:xfrm>
-            <a:off x="2130700" y="1000725"/>
+            <a:off x="1089300" y="958392"/>
             <a:ext cx="4222798" cy="881234"/>
           </a:xfrm>
           <a:prstGeom prst="rect">
@@ -4561,7 +4561,7 @@
         </p:nvCxnSpPr>
         <p:spPr>
           <a:xfrm flipV="1">
-            <a:off x="3403476" y="2479472"/>
+            <a:off x="2362076" y="2437139"/>
             <a:ext cx="368116" cy="450"/>
           </a:xfrm>
           <a:prstGeom prst="straightConnector1">
@@ -4600,7 +4600,7 @@
         </p:nvSpPr>
         <p:spPr>
           <a:xfrm>
-            <a:off x="3454265" y="4120674"/>
+            <a:off x="2412865" y="4078341"/>
             <a:ext cx="2033883" cy="449375"/>
           </a:xfrm>
           <a:prstGeom prst="roundRect">
@@ -4609,7 +4609,7 @@
           <a:noFill/>
           <a:ln>
             <a:solidFill>
-              <a:srgbClr val="5683D0"/>
+              <a:srgbClr val="F47492"/>
             </a:solidFill>
           </a:ln>
         </p:spPr>
@@ -4658,7 +4658,7 @@
         </p:nvSpPr>
         <p:spPr>
           <a:xfrm>
-            <a:off x="2845959" y="3396607"/>
+            <a:off x="1804559" y="3354274"/>
             <a:ext cx="3250494" cy="261610"/>
           </a:xfrm>
           <a:prstGeom prst="rect">
@@ -4716,7 +4716,7 @@
         </p:blipFill>
         <p:spPr>
           <a:xfrm>
-            <a:off x="3537816" y="4154986"/>
+            <a:off x="2496416" y="4112653"/>
             <a:ext cx="333227" cy="333227"/>
           </a:xfrm>
           <a:prstGeom prst="rect">
@@ -4738,7 +4738,7 @@
         </p:nvSpPr>
         <p:spPr>
           <a:xfrm>
-            <a:off x="1749274" y="3929762"/>
+            <a:off x="707874" y="3887429"/>
             <a:ext cx="1434600" cy="351470"/>
           </a:xfrm>
           <a:prstGeom prst="flowChartDocument">
@@ -4803,7 +4803,7 @@
         </p:nvSpPr>
         <p:spPr>
           <a:xfrm>
-            <a:off x="1749273" y="4317732"/>
+            <a:off x="707873" y="4275399"/>
             <a:ext cx="1434600" cy="351470"/>
           </a:xfrm>
           <a:prstGeom prst="flowChartDocument">
@@ -4925,7 +4925,7 @@
         </p:nvSpPr>
         <p:spPr>
           <a:xfrm>
-            <a:off x="5780071" y="4120674"/>
+            <a:off x="4738671" y="4078341"/>
             <a:ext cx="1333583" cy="449375"/>
           </a:xfrm>
           <a:prstGeom prst="flowChartDocument">
@@ -4991,7 +4991,7 @@
         </p:nvSpPr>
         <p:spPr>
           <a:xfrm>
-            <a:off x="1749272" y="4718586"/>
+            <a:off x="707872" y="4676253"/>
             <a:ext cx="1434602" cy="351470"/>
           </a:xfrm>
           <a:prstGeom prst="flowChartDocument">
@@ -5113,7 +5113,7 @@
         </p:nvSpPr>
         <p:spPr>
           <a:xfrm>
-            <a:off x="1749272" y="5123569"/>
+            <a:off x="707872" y="5081236"/>
             <a:ext cx="1434602" cy="351470"/>
           </a:xfrm>
           <a:prstGeom prst="flowChartDocument">
@@ -5178,7 +5178,7 @@
         </p:nvSpPr>
         <p:spPr>
           <a:xfrm>
-            <a:off x="1749272" y="5510196"/>
+            <a:off x="707872" y="5467863"/>
             <a:ext cx="1434602" cy="351470"/>
           </a:xfrm>
           <a:prstGeom prst="flowChartDocument">
@@ -5261,7 +5261,7 @@
         </p:nvSpPr>
         <p:spPr>
           <a:xfrm>
-            <a:off x="3454265" y="4664733"/>
+            <a:off x="2412865" y="4622400"/>
             <a:ext cx="2033883" cy="449375"/>
           </a:xfrm>
           <a:prstGeom prst="roundRect">
@@ -5270,7 +5270,7 @@
           <a:noFill/>
           <a:ln>
             <a:solidFill>
-              <a:srgbClr val="5683D0"/>
+              <a:srgbClr val="F47492"/>
             </a:solidFill>
           </a:ln>
         </p:spPr>
@@ -5327,7 +5327,7 @@
         </p:blipFill>
         <p:spPr>
           <a:xfrm>
-            <a:off x="3537816" y="4699045"/>
+            <a:off x="2496416" y="4656712"/>
             <a:ext cx="333227" cy="333227"/>
           </a:xfrm>
           <a:prstGeom prst="rect">
@@ -5349,7 +5349,7 @@
         </p:nvSpPr>
         <p:spPr>
           <a:xfrm>
-            <a:off x="3851773" y="4760999"/>
+            <a:off x="2810373" y="4718666"/>
             <a:ext cx="1712253" cy="261610"/>
           </a:xfrm>
           <a:prstGeom prst="rect">
@@ -5391,7 +5391,7 @@
         </p:nvSpPr>
         <p:spPr>
           <a:xfrm>
-            <a:off x="3454265" y="5192408"/>
+            <a:off x="2412865" y="5150075"/>
             <a:ext cx="2033883" cy="449375"/>
           </a:xfrm>
           <a:prstGeom prst="roundRect">
@@ -5400,7 +5400,7 @@
           <a:noFill/>
           <a:ln>
             <a:solidFill>
-              <a:srgbClr val="5683D0"/>
+              <a:srgbClr val="F47492"/>
             </a:solidFill>
           </a:ln>
         </p:spPr>
@@ -5457,7 +5457,7 @@
         </p:blipFill>
         <p:spPr>
           <a:xfrm>
-            <a:off x="3537816" y="5226720"/>
+            <a:off x="2496416" y="5184387"/>
             <a:ext cx="333227" cy="333227"/>
           </a:xfrm>
           <a:prstGeom prst="rect">
@@ -5479,7 +5479,7 @@
         </p:nvSpPr>
         <p:spPr>
           <a:xfrm>
-            <a:off x="3851773" y="5288674"/>
+            <a:off x="2810373" y="5246341"/>
             <a:ext cx="1712253" cy="261610"/>
           </a:xfrm>
           <a:prstGeom prst="rect">
@@ -5521,7 +5521,7 @@
         </p:nvSpPr>
         <p:spPr>
           <a:xfrm>
-            <a:off x="5780071" y="4664733"/>
+            <a:off x="4738671" y="4622400"/>
             <a:ext cx="1333583" cy="449375"/>
           </a:xfrm>
           <a:prstGeom prst="flowChartDocument">
@@ -5587,7 +5587,7 @@
         </p:nvSpPr>
         <p:spPr>
           <a:xfrm>
-            <a:off x="5780071" y="5202341"/>
+            <a:off x="4738671" y="5160008"/>
             <a:ext cx="1333583" cy="449375"/>
           </a:xfrm>
           <a:prstGeom prst="flowChartDocument">
@@ -5653,7 +5653,7 @@
         </p:nvSpPr>
         <p:spPr>
           <a:xfrm>
-            <a:off x="1684410" y="3866078"/>
+            <a:off x="643010" y="3823745"/>
             <a:ext cx="1561963" cy="2028639"/>
           </a:xfrm>
           <a:prstGeom prst="rect">
@@ -5710,7 +5710,7 @@
         </p:nvCxnSpPr>
         <p:spPr>
           <a:xfrm rot="5400000">
-            <a:off x="2588433" y="1827916"/>
+            <a:off x="1547033" y="1785583"/>
             <a:ext cx="2148460" cy="3956505"/>
           </a:xfrm>
           <a:prstGeom prst="bentConnector4">
@@ -5755,7 +5755,7 @@
         </p:nvCxnSpPr>
         <p:spPr>
           <a:xfrm flipV="1">
-            <a:off x="4721900" y="2479252"/>
+            <a:off x="3680500" y="2436919"/>
             <a:ext cx="364412" cy="220"/>
           </a:xfrm>
           <a:prstGeom prst="straightConnector1">
@@ -5797,7 +5797,7 @@
         </p:nvCxnSpPr>
         <p:spPr>
           <a:xfrm>
-            <a:off x="3183874" y="4105497"/>
+            <a:off x="2142474" y="4063164"/>
             <a:ext cx="270391" cy="239865"/>
           </a:xfrm>
           <a:prstGeom prst="bentConnector3">
@@ -5839,7 +5839,7 @@
         </p:nvCxnSpPr>
         <p:spPr>
           <a:xfrm flipV="1">
-            <a:off x="3183873" y="4345362"/>
+            <a:off x="2142473" y="4303029"/>
             <a:ext cx="270392" cy="148105"/>
           </a:xfrm>
           <a:prstGeom prst="bentConnector3">
@@ -5881,7 +5881,7 @@
         </p:nvCxnSpPr>
         <p:spPr>
           <a:xfrm>
-            <a:off x="3183874" y="5299304"/>
+            <a:off x="2142474" y="5256971"/>
             <a:ext cx="270391" cy="117792"/>
           </a:xfrm>
           <a:prstGeom prst="bentConnector3">
@@ -5923,7 +5923,7 @@
         </p:nvCxnSpPr>
         <p:spPr>
           <a:xfrm flipV="1">
-            <a:off x="3183874" y="5417096"/>
+            <a:off x="2142474" y="5374763"/>
             <a:ext cx="270391" cy="268835"/>
           </a:xfrm>
           <a:prstGeom prst="bentConnector3">
@@ -5965,7 +5965,7 @@
         </p:nvCxnSpPr>
         <p:spPr>
           <a:xfrm flipV="1">
-            <a:off x="3183874" y="4889421"/>
+            <a:off x="2142474" y="4847088"/>
             <a:ext cx="270391" cy="4900"/>
           </a:xfrm>
           <a:prstGeom prst="straightConnector1">
@@ -6008,7 +6008,7 @@
         </p:nvCxnSpPr>
         <p:spPr>
           <a:xfrm>
-            <a:off x="5488148" y="4345362"/>
+            <a:off x="4446748" y="4303029"/>
             <a:ext cx="291923" cy="0"/>
           </a:xfrm>
           <a:prstGeom prst="straightConnector1">
@@ -6047,7 +6047,7 @@
         </p:nvSpPr>
         <p:spPr>
           <a:xfrm>
-            <a:off x="3829739" y="4216253"/>
+            <a:off x="2788339" y="4173920"/>
             <a:ext cx="1712253" cy="261610"/>
           </a:xfrm>
           <a:prstGeom prst="rect">
@@ -6091,7 +6091,7 @@
         </p:nvCxnSpPr>
         <p:spPr>
           <a:xfrm>
-            <a:off x="5488148" y="4881391"/>
+            <a:off x="4446748" y="4839058"/>
             <a:ext cx="291923" cy="0"/>
           </a:xfrm>
           <a:prstGeom prst="straightConnector1">
@@ -6132,7 +6132,7 @@
         </p:nvCxnSpPr>
         <p:spPr>
           <a:xfrm>
-            <a:off x="5488148" y="5405268"/>
+            <a:off x="4446748" y="5362935"/>
             <a:ext cx="291923" cy="0"/>
           </a:xfrm>
           <a:prstGeom prst="straightConnector1">
@@ -6171,8 +6171,8 @@
         </p:nvSpPr>
         <p:spPr>
           <a:xfrm>
-            <a:off x="7504730" y="3391657"/>
-            <a:ext cx="3896033" cy="2887960"/>
+            <a:off x="6463329" y="2351186"/>
+            <a:ext cx="5449271" cy="3886098"/>
           </a:xfrm>
           <a:prstGeom prst="roundRect">
             <a:avLst/>
@@ -6229,7 +6229,7 @@
         </p:nvSpPr>
         <p:spPr>
           <a:xfrm>
-            <a:off x="8313272" y="3396607"/>
+            <a:off x="8111708" y="2351186"/>
             <a:ext cx="2152512" cy="261610"/>
           </a:xfrm>
           <a:prstGeom prst="rect">
@@ -6279,7 +6279,7 @@
         </p:nvSpPr>
         <p:spPr>
           <a:xfrm>
-            <a:off x="7643241" y="3918208"/>
+            <a:off x="6601841" y="3875875"/>
             <a:ext cx="2033883" cy="449375"/>
           </a:xfrm>
           <a:prstGeom prst="roundRect">
@@ -6288,7 +6288,7 @@
           <a:noFill/>
           <a:ln>
             <a:solidFill>
-              <a:srgbClr val="5683D0"/>
+              <a:srgbClr val="F47492"/>
             </a:solidFill>
           </a:ln>
         </p:spPr>
@@ -6345,7 +6345,7 @@
         </p:blipFill>
         <p:spPr>
           <a:xfrm>
-            <a:off x="7726792" y="3952520"/>
+            <a:off x="6685392" y="3910187"/>
             <a:ext cx="333227" cy="333227"/>
           </a:xfrm>
           <a:prstGeom prst="rect">
@@ -6367,7 +6367,7 @@
         </p:nvSpPr>
         <p:spPr>
           <a:xfrm>
-            <a:off x="8040749" y="4014474"/>
+            <a:off x="6999349" y="3972141"/>
             <a:ext cx="1456429" cy="261610"/>
           </a:xfrm>
           <a:prstGeom prst="rect">
@@ -6386,7 +6386,7 @@
                 <a:latin typeface="Arial Rounded MT Bold" panose="020F0704030504030204" pitchFamily="34" charset="0"/>
                 <a:ea typeface="나눔고딕" panose="020D0604000000000000" pitchFamily="50" charset="-127"/>
               </a:rPr>
-              <a:t>종합 분석 에이전트</a:t>
+              <a:t>상권 작명 에이전트</a:t>
             </a:r>
             <a:endParaRPr lang="en-US" altLang="ko-KR" sz="1100" b="1" dirty="0">
               <a:latin typeface="Arial Rounded MT Bold" panose="020F0704030504030204" pitchFamily="34" charset="0"/>
@@ -6409,7 +6409,7 @@
         </p:nvSpPr>
         <p:spPr>
           <a:xfrm>
-            <a:off x="5640915" y="3866078"/>
+            <a:off x="4599515" y="3823745"/>
             <a:ext cx="1561963" cy="2028639"/>
           </a:xfrm>
           <a:prstGeom prst="rect">
@@ -6462,7 +6462,7 @@
         </p:nvSpPr>
         <p:spPr>
           <a:xfrm>
-            <a:off x="7643241" y="4653716"/>
+            <a:off x="6601841" y="4611383"/>
             <a:ext cx="2033883" cy="449375"/>
           </a:xfrm>
           <a:prstGeom prst="roundRect">
@@ -6471,7 +6471,7 @@
           <a:noFill/>
           <a:ln>
             <a:solidFill>
-              <a:srgbClr val="5683D0"/>
+              <a:srgbClr val="F47492"/>
             </a:solidFill>
           </a:ln>
         </p:spPr>
@@ -6528,7 +6528,7 @@
         </p:blipFill>
         <p:spPr>
           <a:xfrm>
-            <a:off x="7726792" y="4688028"/>
+            <a:off x="6685392" y="4645695"/>
             <a:ext cx="333227" cy="333227"/>
           </a:xfrm>
           <a:prstGeom prst="rect">
@@ -6550,7 +6550,7 @@
         </p:nvSpPr>
         <p:spPr>
           <a:xfrm>
-            <a:off x="8040749" y="4749982"/>
+            <a:off x="6999349" y="4707649"/>
             <a:ext cx="1348779" cy="261610"/>
           </a:xfrm>
           <a:prstGeom prst="rect">
@@ -6565,11 +6565,11 @@
           <a:lstStyle/>
           <a:p>
             <a:r>
-              <a:rPr lang="ko-KR" altLang="en-US" sz="1100" b="1">
+              <a:rPr lang="ko-KR" altLang="en-US" sz="1100" b="1" dirty="0">
                 <a:latin typeface="Arial Rounded MT Bold" panose="020F0704030504030204" pitchFamily="34" charset="0"/>
                 <a:ea typeface="나눔고딕" panose="020D0604000000000000" pitchFamily="50" charset="-127"/>
               </a:rPr>
-              <a:t>상권 작명 에이전트</a:t>
+              <a:t>종합 분석 에이전트</a:t>
             </a:r>
             <a:endParaRPr lang="en-US" altLang="ko-KR" sz="1100" b="1" dirty="0">
               <a:latin typeface="Arial Rounded MT Bold" panose="020F0704030504030204" pitchFamily="34" charset="0"/>
@@ -6578,12 +6578,57 @@
           </a:p>
         </p:txBody>
       </p:sp>
-      <p:sp>
-        <p:nvSpPr>
-          <p:cNvPr id="209" name="순서도: 자기 디스크 208">
-            <a:extLst>
-              <a:ext uri="{FF2B5EF4-FFF2-40B4-BE49-F238E27FC236}">
-                <a16:creationId xmlns:a16="http://schemas.microsoft.com/office/drawing/2014/main" id="{AAC29BF8-4C94-4F44-9C64-91D271D5EFA4}"/>
+      <p:cxnSp>
+        <p:nvCxnSpPr>
+          <p:cNvPr id="165" name="연결선: 꺾임 164">
+            <a:extLst>
+              <a:ext uri="{FF2B5EF4-FFF2-40B4-BE49-F238E27FC236}">
+                <a16:creationId xmlns:a16="http://schemas.microsoft.com/office/drawing/2014/main" id="{A589F15E-A6CA-42C5-9736-1BCD27B9D993}"/>
+              </a:ext>
+            </a:extLst>
+          </p:cNvPr>
+          <p:cNvCxnSpPr>
+            <a:cxnSpLocks/>
+            <a:stCxn id="196" idx="3"/>
+            <a:endCxn id="190" idx="1"/>
+          </p:cNvCxnSpPr>
+          <p:nvPr/>
+        </p:nvCxnSpPr>
+        <p:spPr>
+          <a:xfrm flipV="1">
+            <a:off x="6161478" y="4100563"/>
+            <a:ext cx="440363" cy="737502"/>
+          </a:xfrm>
+          <a:prstGeom prst="bentConnector3">
+            <a:avLst>
+              <a:gd name="adj1" fmla="val 50000"/>
+            </a:avLst>
+          </a:prstGeom>
+          <a:ln>
+            <a:tailEnd type="triangle"/>
+          </a:ln>
+        </p:spPr>
+        <p:style>
+          <a:lnRef idx="1">
+            <a:schemeClr val="dk1"/>
+          </a:lnRef>
+          <a:fillRef idx="0">
+            <a:schemeClr val="dk1"/>
+          </a:fillRef>
+          <a:effectRef idx="0">
+            <a:schemeClr val="dk1"/>
+          </a:effectRef>
+          <a:fontRef idx="minor">
+            <a:schemeClr val="tx1"/>
+          </a:fontRef>
+        </p:style>
+      </p:cxnSp>
+      <p:sp>
+        <p:nvSpPr>
+          <p:cNvPr id="215" name="순서도: 문서 214">
+            <a:extLst>
+              <a:ext uri="{FF2B5EF4-FFF2-40B4-BE49-F238E27FC236}">
+                <a16:creationId xmlns:a16="http://schemas.microsoft.com/office/drawing/2014/main" id="{BB85AF5B-436E-40FC-8A2E-625B7B75FED6}"/>
               </a:ext>
             </a:extLst>
           </p:cNvPr>
@@ -6592,17 +6637,14 @@
         </p:nvSpPr>
         <p:spPr>
           <a:xfrm>
-            <a:off x="8190478" y="5528235"/>
-            <a:ext cx="937982" cy="703077"/>
-          </a:xfrm>
-          <a:prstGeom prst="flowChartMagneticDisk">
+            <a:off x="8829926" y="3875875"/>
+            <a:ext cx="1333583" cy="449375"/>
+          </a:xfrm>
+          <a:prstGeom prst="flowChartDocument">
             <a:avLst/>
           </a:prstGeom>
           <a:solidFill>
-            <a:schemeClr val="accent6">
-              <a:lumMod val="40000"/>
-              <a:lumOff val="60000"/>
-            </a:schemeClr>
+            <a:srgbClr val="FBE5D6"/>
           </a:solidFill>
           <a:ln>
             <a:solidFill>
@@ -6632,93 +6674,24 @@
           <a:p>
             <a:pPr algn="ctr"/>
             <a:r>
-              <a:rPr lang="ko-KR" altLang="en-US" sz="1000" b="1" dirty="0">
+              <a:rPr lang="ko-KR" altLang="en-US" sz="1100" b="1" dirty="0">
                 <a:solidFill>
                   <a:schemeClr val="tx1"/>
                 </a:solidFill>
                 <a:latin typeface="나눔고딕" panose="020D0604000000000000" pitchFamily="50" charset="-127"/>
                 <a:ea typeface="나눔고딕" panose="020D0604000000000000" pitchFamily="50" charset="-127"/>
               </a:rPr>
-              <a:t>사용자 </a:t>
-            </a:r>
-            <a:endParaRPr lang="en-US" altLang="ko-KR" sz="1000" b="1" dirty="0">
-              <a:solidFill>
-                <a:schemeClr val="tx1"/>
-              </a:solidFill>
-              <a:latin typeface="나눔고딕" panose="020D0604000000000000" pitchFamily="50" charset="-127"/>
-              <a:ea typeface="나눔고딕" panose="020D0604000000000000" pitchFamily="50" charset="-127"/>
-            </a:endParaRPr>
-          </a:p>
-          <a:p>
-            <a:pPr algn="ctr"/>
-            <a:r>
-              <a:rPr lang="ko-KR" altLang="en-US" sz="1000" b="1" dirty="0">
-                <a:solidFill>
-                  <a:schemeClr val="tx1"/>
-                </a:solidFill>
-                <a:latin typeface="나눔고딕" panose="020D0604000000000000" pitchFamily="50" charset="-127"/>
-                <a:ea typeface="나눔고딕" panose="020D0604000000000000" pitchFamily="50" charset="-127"/>
-              </a:rPr>
-              <a:t>클러스터</a:t>
-            </a:r>
-            <a:endParaRPr lang="ko-KR" altLang="en-US" sz="1000" b="1" dirty="0">
-              <a:latin typeface="나눔고딕" panose="020D0604000000000000" pitchFamily="50" charset="-127"/>
-              <a:ea typeface="나눔고딕" panose="020D0604000000000000" pitchFamily="50" charset="-127"/>
-            </a:endParaRPr>
-          </a:p>
-        </p:txBody>
-      </p:sp>
-      <p:cxnSp>
-        <p:nvCxnSpPr>
-          <p:cNvPr id="165" name="연결선: 꺾임 164">
-            <a:extLst>
-              <a:ext uri="{FF2B5EF4-FFF2-40B4-BE49-F238E27FC236}">
-                <a16:creationId xmlns:a16="http://schemas.microsoft.com/office/drawing/2014/main" id="{A589F15E-A6CA-42C5-9736-1BCD27B9D993}"/>
-              </a:ext>
-            </a:extLst>
-          </p:cNvPr>
-          <p:cNvCxnSpPr>
-            <a:cxnSpLocks/>
-            <a:stCxn id="196" idx="3"/>
-            <a:endCxn id="190" idx="1"/>
-          </p:cNvCxnSpPr>
-          <p:nvPr/>
-        </p:nvCxnSpPr>
-        <p:spPr>
-          <a:xfrm flipV="1">
-            <a:off x="7202878" y="4142896"/>
-            <a:ext cx="440363" cy="737502"/>
-          </a:xfrm>
-          <a:prstGeom prst="bentConnector3">
-            <a:avLst>
-              <a:gd name="adj1" fmla="val 50000"/>
-            </a:avLst>
-          </a:prstGeom>
-          <a:ln>
-            <a:tailEnd type="triangle"/>
-          </a:ln>
-        </p:spPr>
-        <p:style>
-          <a:lnRef idx="1">
-            <a:schemeClr val="dk1"/>
-          </a:lnRef>
-          <a:fillRef idx="0">
-            <a:schemeClr val="dk1"/>
-          </a:fillRef>
-          <a:effectRef idx="0">
-            <a:schemeClr val="dk1"/>
-          </a:effectRef>
-          <a:fontRef idx="minor">
-            <a:schemeClr val="tx1"/>
-          </a:fontRef>
-        </p:style>
-      </p:cxnSp>
-      <p:sp>
-        <p:nvSpPr>
-          <p:cNvPr id="215" name="순서도: 문서 214">
-            <a:extLst>
-              <a:ext uri="{FF2B5EF4-FFF2-40B4-BE49-F238E27FC236}">
-                <a16:creationId xmlns:a16="http://schemas.microsoft.com/office/drawing/2014/main" id="{BB85AF5B-436E-40FC-8A2E-625B7B75FED6}"/>
+              <a:t>상권 작명 결과</a:t>
+            </a:r>
+          </a:p>
+        </p:txBody>
+      </p:sp>
+      <p:sp>
+        <p:nvSpPr>
+          <p:cNvPr id="216" name="순서도: 문서 215">
+            <a:extLst>
+              <a:ext uri="{FF2B5EF4-FFF2-40B4-BE49-F238E27FC236}">
+                <a16:creationId xmlns:a16="http://schemas.microsoft.com/office/drawing/2014/main" id="{080C3733-EDE0-47F6-B885-701CBE5516AA}"/>
               </a:ext>
             </a:extLst>
           </p:cNvPr>
@@ -6727,17 +6700,14 @@
         </p:nvSpPr>
         <p:spPr>
           <a:xfrm>
-            <a:off x="9871326" y="3918208"/>
+            <a:off x="8829926" y="4618174"/>
             <a:ext cx="1333583" cy="449375"/>
           </a:xfrm>
           <a:prstGeom prst="flowChartDocument">
             <a:avLst/>
           </a:prstGeom>
           <a:solidFill>
-            <a:schemeClr val="accent2">
-              <a:lumMod val="40000"/>
-              <a:lumOff val="60000"/>
-            </a:schemeClr>
+            <a:srgbClr val="FBE5D6"/>
           </a:solidFill>
           <a:ln>
             <a:solidFill>
@@ -6767,7 +6737,7 @@
           <a:p>
             <a:pPr algn="ctr"/>
             <a:r>
-              <a:rPr lang="ko-KR" altLang="en-US" sz="1100" b="1">
+              <a:rPr lang="ko-KR" altLang="en-US" sz="1100" b="1" dirty="0">
                 <a:solidFill>
                   <a:schemeClr val="tx1"/>
                 </a:solidFill>
@@ -6776,79 +6746,6 @@
               </a:rPr>
               <a:t>종합 분석 보고서</a:t>
             </a:r>
-            <a:endParaRPr lang="ko-KR" altLang="en-US" sz="1100" b="1" dirty="0">
-              <a:solidFill>
-                <a:schemeClr val="tx1"/>
-              </a:solidFill>
-              <a:latin typeface="나눔고딕" panose="020D0604000000000000" pitchFamily="50" charset="-127"/>
-              <a:ea typeface="나눔고딕" panose="020D0604000000000000" pitchFamily="50" charset="-127"/>
-            </a:endParaRPr>
-          </a:p>
-        </p:txBody>
-      </p:sp>
-      <p:sp>
-        <p:nvSpPr>
-          <p:cNvPr id="216" name="순서도: 문서 215">
-            <a:extLst>
-              <a:ext uri="{FF2B5EF4-FFF2-40B4-BE49-F238E27FC236}">
-                <a16:creationId xmlns:a16="http://schemas.microsoft.com/office/drawing/2014/main" id="{080C3733-EDE0-47F6-B885-701CBE5516AA}"/>
-              </a:ext>
-            </a:extLst>
-          </p:cNvPr>
-          <p:cNvSpPr/>
-          <p:nvPr/>
-        </p:nvSpPr>
-        <p:spPr>
-          <a:xfrm>
-            <a:off x="9871326" y="4660507"/>
-            <a:ext cx="1333583" cy="449375"/>
-          </a:xfrm>
-          <a:prstGeom prst="flowChartDocument">
-            <a:avLst/>
-          </a:prstGeom>
-          <a:solidFill>
-            <a:schemeClr val="accent2">
-              <a:lumMod val="40000"/>
-              <a:lumOff val="60000"/>
-            </a:schemeClr>
-          </a:solidFill>
-          <a:ln>
-            <a:solidFill>
-              <a:schemeClr val="tx1"/>
-            </a:solidFill>
-          </a:ln>
-        </p:spPr>
-        <p:style>
-          <a:lnRef idx="2">
-            <a:schemeClr val="accent1">
-              <a:shade val="50000"/>
-            </a:schemeClr>
-          </a:lnRef>
-          <a:fillRef idx="1">
-            <a:schemeClr val="accent1"/>
-          </a:fillRef>
-          <a:effectRef idx="0">
-            <a:schemeClr val="accent1"/>
-          </a:effectRef>
-          <a:fontRef idx="minor">
-            <a:schemeClr val="lt1"/>
-          </a:fontRef>
-        </p:style>
-        <p:txBody>
-          <a:bodyPr rtlCol="0" anchor="ctr"/>
-          <a:lstStyle/>
-          <a:p>
-            <a:pPr algn="ctr"/>
-            <a:r>
-              <a:rPr lang="ko-KR" altLang="en-US" sz="1100" b="1" dirty="0">
-                <a:solidFill>
-                  <a:schemeClr val="tx1"/>
-                </a:solidFill>
-                <a:latin typeface="나눔고딕" panose="020D0604000000000000" pitchFamily="50" charset="-127"/>
-                <a:ea typeface="나눔고딕" panose="020D0604000000000000" pitchFamily="50" charset="-127"/>
-              </a:rPr>
-              <a:t>상권 작명 결과</a:t>
-            </a:r>
           </a:p>
         </p:txBody>
       </p:sp>
@@ -6869,7 +6766,7 @@
         </p:nvCxnSpPr>
         <p:spPr>
           <a:xfrm>
-            <a:off x="9677124" y="4142896"/>
+            <a:off x="8635724" y="4100563"/>
             <a:ext cx="194202" cy="0"/>
           </a:xfrm>
           <a:prstGeom prst="straightConnector1">
@@ -6911,7 +6808,7 @@
         </p:nvCxnSpPr>
         <p:spPr>
           <a:xfrm>
-            <a:off x="9677124" y="4878404"/>
+            <a:off x="8635724" y="4836071"/>
             <a:ext cx="194202" cy="6791"/>
           </a:xfrm>
           <a:prstGeom prst="straightConnector1">
@@ -6953,7 +6850,7 @@
         </p:nvCxnSpPr>
         <p:spPr>
           <a:xfrm>
-            <a:off x="4242099" y="1881959"/>
+            <a:off x="3200699" y="1839626"/>
             <a:ext cx="4647" cy="348375"/>
           </a:xfrm>
           <a:prstGeom prst="straightConnector1">
@@ -6995,7 +6892,7 @@
         </p:nvCxnSpPr>
         <p:spPr>
           <a:xfrm flipV="1">
-            <a:off x="7202878" y="4878404"/>
+            <a:off x="6161478" y="4836071"/>
             <a:ext cx="440363" cy="1994"/>
           </a:xfrm>
           <a:prstGeom prst="straightConnector1">
@@ -7030,15 +6927,16 @@
             </a:extLst>
           </p:cNvPr>
           <p:cNvCxnSpPr>
-            <a:stCxn id="209" idx="1"/>
+            <a:cxnSpLocks/>
+            <a:stCxn id="5" idx="0"/>
             <a:endCxn id="197" idx="2"/>
           </p:cNvCxnSpPr>
           <p:nvPr/>
         </p:nvCxnSpPr>
         <p:spPr>
           <a:xfrm flipV="1">
-            <a:off x="8659469" y="5103091"/>
-            <a:ext cx="714" cy="425144"/>
+            <a:off x="7617596" y="5060758"/>
+            <a:ext cx="1187" cy="425144"/>
           </a:xfrm>
           <a:prstGeom prst="straightConnector1">
             <a:avLst/>
@@ -7072,23 +6970,392 @@
             </a:extLst>
           </p:cNvPr>
           <p:cNvCxnSpPr>
-            <a:stCxn id="215" idx="3"/>
-            <a:endCxn id="209" idx="4"/>
+            <a:cxnSpLocks/>
+            <a:stCxn id="216" idx="2"/>
+            <a:endCxn id="5" idx="3"/>
           </p:cNvCxnSpPr>
           <p:nvPr/>
         </p:nvCxnSpPr>
         <p:spPr>
-          <a:xfrm flipH="1">
-            <a:off x="9128460" y="4142896"/>
-            <a:ext cx="2076449" cy="1736878"/>
-          </a:xfrm>
-          <a:prstGeom prst="bentConnector3">
-            <a:avLst>
-              <a:gd name="adj1" fmla="val -5703"/>
-            </a:avLst>
+          <a:xfrm rot="5400000">
+            <a:off x="8333127" y="4587453"/>
+            <a:ext cx="713205" cy="1613979"/>
+          </a:xfrm>
+          <a:prstGeom prst="bentConnector2">
+            <a:avLst/>
           </a:prstGeom>
           <a:ln>
             <a:prstDash val="dash"/>
+            <a:tailEnd type="triangle"/>
+          </a:ln>
+        </p:spPr>
+        <p:style>
+          <a:lnRef idx="1">
+            <a:schemeClr val="dk1"/>
+          </a:lnRef>
+          <a:fillRef idx="0">
+            <a:schemeClr val="dk1"/>
+          </a:fillRef>
+          <a:effectRef idx="0">
+            <a:schemeClr val="dk1"/>
+          </a:effectRef>
+          <a:fontRef idx="minor">
+            <a:schemeClr val="tx1"/>
+          </a:fontRef>
+        </p:style>
+      </p:cxnSp>
+      <p:pic>
+        <p:nvPicPr>
+          <p:cNvPr id="5" name="그림 4">
+            <a:extLst>
+              <a:ext uri="{FF2B5EF4-FFF2-40B4-BE49-F238E27FC236}">
+                <a16:creationId xmlns:a16="http://schemas.microsoft.com/office/drawing/2014/main" id="{157090F4-C024-43F3-84B2-2A198FFDB1FF}"/>
+              </a:ext>
+            </a:extLst>
+          </p:cNvPr>
+          <p:cNvPicPr>
+            <a:picLocks noChangeAspect="1"/>
+          </p:cNvPicPr>
+          <p:nvPr/>
+        </p:nvPicPr>
+        <p:blipFill>
+          <a:blip r:embed="rId3"/>
+          <a:stretch>
+            <a:fillRect/>
+          </a:stretch>
+        </p:blipFill>
+        <p:spPr>
+          <a:xfrm>
+            <a:off x="7352453" y="5485902"/>
+            <a:ext cx="530286" cy="530286"/>
+          </a:xfrm>
+          <a:prstGeom prst="rect">
+            <a:avLst/>
+          </a:prstGeom>
+        </p:spPr>
+      </p:pic>
+      <p:sp>
+        <p:nvSpPr>
+          <p:cNvPr id="6" name="TextBox 5">
+            <a:extLst>
+              <a:ext uri="{FF2B5EF4-FFF2-40B4-BE49-F238E27FC236}">
+                <a16:creationId xmlns:a16="http://schemas.microsoft.com/office/drawing/2014/main" id="{8A4B411E-3538-443C-A549-BB2C371145AA}"/>
+              </a:ext>
+            </a:extLst>
+          </p:cNvPr>
+          <p:cNvSpPr txBox="1"/>
+          <p:nvPr/>
+        </p:nvSpPr>
+        <p:spPr>
+          <a:xfrm>
+            <a:off x="6753417" y="5997462"/>
+            <a:ext cx="1728358" cy="261610"/>
+          </a:xfrm>
+          <a:prstGeom prst="rect">
+            <a:avLst/>
+          </a:prstGeom>
+          <a:noFill/>
+        </p:spPr>
+        <p:txBody>
+          <a:bodyPr wrap="none" rtlCol="0">
+            <a:spAutoFit/>
+          </a:bodyPr>
+          <a:lstStyle/>
+          <a:p>
+            <a:r>
+              <a:rPr lang="ko-KR" altLang="en-US" sz="1100" b="1" dirty="0">
+                <a:latin typeface="나눔고딕" panose="020D0604000000000000" pitchFamily="50" charset="-127"/>
+                <a:ea typeface="나눔고딕" panose="020D0604000000000000" pitchFamily="50" charset="-127"/>
+              </a:rPr>
+              <a:t>사용자 클러스터 업데이트</a:t>
+            </a:r>
+          </a:p>
+        </p:txBody>
+      </p:sp>
+      <p:sp>
+        <p:nvSpPr>
+          <p:cNvPr id="72" name="순서도: 자기 디스크 71">
+            <a:extLst>
+              <a:ext uri="{FF2B5EF4-FFF2-40B4-BE49-F238E27FC236}">
+                <a16:creationId xmlns:a16="http://schemas.microsoft.com/office/drawing/2014/main" id="{2F8B61B1-2C20-4296-B2A1-680B75EF0470}"/>
+              </a:ext>
+            </a:extLst>
+          </p:cNvPr>
+          <p:cNvSpPr/>
+          <p:nvPr/>
+        </p:nvSpPr>
+        <p:spPr>
+          <a:xfrm>
+            <a:off x="7148605" y="2747654"/>
+            <a:ext cx="937982" cy="703077"/>
+          </a:xfrm>
+          <a:prstGeom prst="flowChartMagneticDisk">
+            <a:avLst/>
+          </a:prstGeom>
+          <a:solidFill>
+            <a:schemeClr val="accent6">
+              <a:lumMod val="40000"/>
+              <a:lumOff val="60000"/>
+            </a:schemeClr>
+          </a:solidFill>
+          <a:ln>
+            <a:solidFill>
+              <a:schemeClr val="tx1"/>
+            </a:solidFill>
+          </a:ln>
+        </p:spPr>
+        <p:style>
+          <a:lnRef idx="2">
+            <a:schemeClr val="accent1">
+              <a:shade val="50000"/>
+            </a:schemeClr>
+          </a:lnRef>
+          <a:fillRef idx="1">
+            <a:schemeClr val="accent1"/>
+          </a:fillRef>
+          <a:effectRef idx="0">
+            <a:schemeClr val="accent1"/>
+          </a:effectRef>
+          <a:fontRef idx="minor">
+            <a:schemeClr val="lt1"/>
+          </a:fontRef>
+        </p:style>
+        <p:txBody>
+          <a:bodyPr rtlCol="0" anchor="ctr"/>
+          <a:lstStyle/>
+          <a:p>
+            <a:pPr algn="ctr"/>
+            <a:r>
+              <a:rPr lang="ko-KR" altLang="en-US" sz="1000" b="1" dirty="0">
+                <a:solidFill>
+                  <a:schemeClr val="tx1"/>
+                </a:solidFill>
+                <a:latin typeface="나눔고딕" panose="020D0604000000000000" pitchFamily="50" charset="-127"/>
+                <a:ea typeface="나눔고딕" panose="020D0604000000000000" pitchFamily="50" charset="-127"/>
+              </a:rPr>
+              <a:t>상권 이름</a:t>
+            </a:r>
+            <a:endParaRPr lang="ko-KR" altLang="en-US" sz="1000" b="1" dirty="0">
+              <a:latin typeface="나눔고딕" panose="020D0604000000000000" pitchFamily="50" charset="-127"/>
+              <a:ea typeface="나눔고딕" panose="020D0604000000000000" pitchFamily="50" charset="-127"/>
+            </a:endParaRPr>
+          </a:p>
+        </p:txBody>
+      </p:sp>
+      <p:cxnSp>
+        <p:nvCxnSpPr>
+          <p:cNvPr id="16" name="직선 화살표 연결선 15">
+            <a:extLst>
+              <a:ext uri="{FF2B5EF4-FFF2-40B4-BE49-F238E27FC236}">
+                <a16:creationId xmlns:a16="http://schemas.microsoft.com/office/drawing/2014/main" id="{1C915C46-CE6D-4022-A41E-AFBBC5B48BB4}"/>
+              </a:ext>
+            </a:extLst>
+          </p:cNvPr>
+          <p:cNvCxnSpPr>
+            <a:stCxn id="72" idx="3"/>
+            <a:endCxn id="190" idx="0"/>
+          </p:cNvCxnSpPr>
+          <p:nvPr/>
+        </p:nvCxnSpPr>
+        <p:spPr>
+          <a:xfrm>
+            <a:off x="7617596" y="3450731"/>
+            <a:ext cx="1187" cy="425144"/>
+          </a:xfrm>
+          <a:prstGeom prst="straightConnector1">
+            <a:avLst/>
+          </a:prstGeom>
+          <a:ln>
+            <a:tailEnd type="triangle"/>
+          </a:ln>
+        </p:spPr>
+        <p:style>
+          <a:lnRef idx="1">
+            <a:schemeClr val="dk1"/>
+          </a:lnRef>
+          <a:fillRef idx="0">
+            <a:schemeClr val="dk1"/>
+          </a:fillRef>
+          <a:effectRef idx="0">
+            <a:schemeClr val="dk1"/>
+          </a:effectRef>
+          <a:fontRef idx="minor">
+            <a:schemeClr val="tx1"/>
+          </a:fontRef>
+        </p:style>
+      </p:cxnSp>
+      <p:cxnSp>
+        <p:nvCxnSpPr>
+          <p:cNvPr id="19" name="연결선: 꺾임 18">
+            <a:extLst>
+              <a:ext uri="{FF2B5EF4-FFF2-40B4-BE49-F238E27FC236}">
+                <a16:creationId xmlns:a16="http://schemas.microsoft.com/office/drawing/2014/main" id="{7DEEB331-04C7-4257-B923-A78F64DD11A6}"/>
+              </a:ext>
+            </a:extLst>
+          </p:cNvPr>
+          <p:cNvCxnSpPr>
+            <a:stCxn id="215" idx="0"/>
+            <a:endCxn id="72" idx="4"/>
+          </p:cNvCxnSpPr>
+          <p:nvPr/>
+        </p:nvCxnSpPr>
+        <p:spPr>
+          <a:xfrm rot="16200000" flipV="1">
+            <a:off x="8403312" y="2782468"/>
+            <a:ext cx="776682" cy="1410131"/>
+          </a:xfrm>
+          <a:prstGeom prst="bentConnector2">
+            <a:avLst/>
+          </a:prstGeom>
+          <a:ln>
+            <a:prstDash val="dash"/>
+            <a:tailEnd type="triangle"/>
+          </a:ln>
+        </p:spPr>
+        <p:style>
+          <a:lnRef idx="1">
+            <a:schemeClr val="dk1"/>
+          </a:lnRef>
+          <a:fillRef idx="0">
+            <a:schemeClr val="dk1"/>
+          </a:fillRef>
+          <a:effectRef idx="0">
+            <a:schemeClr val="dk1"/>
+          </a:effectRef>
+          <a:fontRef idx="minor">
+            <a:schemeClr val="tx1"/>
+          </a:fontRef>
+        </p:style>
+      </p:cxnSp>
+      <p:sp>
+        <p:nvSpPr>
+          <p:cNvPr id="20" name="두루마리 모양: 가로로 말림 19">
+            <a:extLst>
+              <a:ext uri="{FF2B5EF4-FFF2-40B4-BE49-F238E27FC236}">
+                <a16:creationId xmlns:a16="http://schemas.microsoft.com/office/drawing/2014/main" id="{7E6134F5-0347-4534-8A1F-87DF6A06E530}"/>
+              </a:ext>
+            </a:extLst>
+          </p:cNvPr>
+          <p:cNvSpPr/>
+          <p:nvPr/>
+        </p:nvSpPr>
+        <p:spPr>
+          <a:xfrm>
+            <a:off x="10499537" y="4216964"/>
+            <a:ext cx="1333583" cy="449375"/>
+          </a:xfrm>
+          <a:prstGeom prst="horizontalScroll">
+            <a:avLst/>
+          </a:prstGeom>
+          <a:solidFill>
+            <a:srgbClr val="FBE5D6"/>
+          </a:solidFill>
+          <a:ln>
+            <a:solidFill>
+              <a:schemeClr val="tx1"/>
+            </a:solidFill>
+          </a:ln>
+        </p:spPr>
+        <p:style>
+          <a:lnRef idx="2">
+            <a:schemeClr val="accent1">
+              <a:shade val="50000"/>
+            </a:schemeClr>
+          </a:lnRef>
+          <a:fillRef idx="1">
+            <a:schemeClr val="accent1"/>
+          </a:fillRef>
+          <a:effectRef idx="0">
+            <a:schemeClr val="accent1"/>
+          </a:effectRef>
+          <a:fontRef idx="minor">
+            <a:schemeClr val="lt1"/>
+          </a:fontRef>
+        </p:style>
+        <p:txBody>
+          <a:bodyPr rtlCol="0" anchor="ctr"/>
+          <a:lstStyle/>
+          <a:p>
+            <a:pPr algn="ctr"/>
+            <a:r>
+              <a:rPr lang="ko-KR" altLang="en-US" sz="1100" b="1" dirty="0">
+                <a:solidFill>
+                  <a:schemeClr val="tx1"/>
+                </a:solidFill>
+                <a:latin typeface="나눔고딕" panose="020D0604000000000000" pitchFamily="50" charset="-127"/>
+                <a:ea typeface="나눔고딕" panose="020D0604000000000000" pitchFamily="50" charset="-127"/>
+              </a:rPr>
+              <a:t>분석 결과</a:t>
+            </a:r>
+          </a:p>
+        </p:txBody>
+      </p:sp>
+      <p:cxnSp>
+        <p:nvCxnSpPr>
+          <p:cNvPr id="22" name="연결선: 꺾임 21">
+            <a:extLst>
+              <a:ext uri="{FF2B5EF4-FFF2-40B4-BE49-F238E27FC236}">
+                <a16:creationId xmlns:a16="http://schemas.microsoft.com/office/drawing/2014/main" id="{194997C2-9D5F-4D3B-B516-7528513109FA}"/>
+              </a:ext>
+            </a:extLst>
+          </p:cNvPr>
+          <p:cNvCxnSpPr>
+            <a:stCxn id="215" idx="3"/>
+            <a:endCxn id="20" idx="1"/>
+          </p:cNvCxnSpPr>
+          <p:nvPr/>
+        </p:nvCxnSpPr>
+        <p:spPr>
+          <a:xfrm>
+            <a:off x="10163509" y="4100563"/>
+            <a:ext cx="336028" cy="341089"/>
+          </a:xfrm>
+          <a:prstGeom prst="bentConnector3">
+            <a:avLst/>
+          </a:prstGeom>
+          <a:ln>
+            <a:tailEnd type="triangle"/>
+          </a:ln>
+        </p:spPr>
+        <p:style>
+          <a:lnRef idx="1">
+            <a:schemeClr val="dk1"/>
+          </a:lnRef>
+          <a:fillRef idx="0">
+            <a:schemeClr val="dk1"/>
+          </a:fillRef>
+          <a:effectRef idx="0">
+            <a:schemeClr val="dk1"/>
+          </a:effectRef>
+          <a:fontRef idx="minor">
+            <a:schemeClr val="tx1"/>
+          </a:fontRef>
+        </p:style>
+      </p:cxnSp>
+      <p:cxnSp>
+        <p:nvCxnSpPr>
+          <p:cNvPr id="24" name="연결선: 꺾임 23">
+            <a:extLst>
+              <a:ext uri="{FF2B5EF4-FFF2-40B4-BE49-F238E27FC236}">
+                <a16:creationId xmlns:a16="http://schemas.microsoft.com/office/drawing/2014/main" id="{E3DDB2D8-C331-4558-962B-989A1ADFF6CE}"/>
+              </a:ext>
+            </a:extLst>
+          </p:cNvPr>
+          <p:cNvCxnSpPr>
+            <a:stCxn id="216" idx="3"/>
+            <a:endCxn id="20" idx="1"/>
+          </p:cNvCxnSpPr>
+          <p:nvPr/>
+        </p:nvCxnSpPr>
+        <p:spPr>
+          <a:xfrm flipV="1">
+            <a:off x="10163509" y="4441652"/>
+            <a:ext cx="336028" cy="401210"/>
+          </a:xfrm>
+          <a:prstGeom prst="bentConnector3">
+            <a:avLst/>
+          </a:prstGeom>
+          <a:ln>
             <a:tailEnd type="triangle"/>
           </a:ln>
         </p:spPr>
